--- a/chapter5/parts/part-10-challenges-and-best-practices/clip.pptx
+++ b/chapter5/parts/part-10-challenges-and-best-practices/clip.pptx
@@ -4255,10 +4255,12 @@
           </a:bodyPr>
           <a:lstStyle/>
           <a:p>
-            <a:pPr>
+            <a:pPr lvl="0" marL="457200" indent="-228600">
+              <a:buFont typeface="Calibri"/>
               <a:spcAft>
                 <a:spcPts val="1000"/>
               </a:spcAft>
+              <a:buSzPct val="100000"/>
               <a:buChar char="•"/>
               <a:lnSpc>
                 <a:spcPts val="2200"/>
@@ -4275,10 +4277,12 @@
             </a:r>
           </a:p>
           <a:p>
-            <a:pPr>
+            <a:pPr lvl="0" marL="457200" indent="-228600">
+              <a:buFont typeface="Calibri"/>
               <a:spcAft>
                 <a:spcPts val="1000"/>
               </a:spcAft>
+              <a:buSzPct val="100000"/>
               <a:buChar char="•"/>
               <a:lnSpc>
                 <a:spcPts val="2200"/>
@@ -4295,10 +4299,12 @@
             </a:r>
           </a:p>
           <a:p>
-            <a:pPr>
+            <a:pPr lvl="0" marL="457200" indent="-228600">
+              <a:buFont typeface="Calibri"/>
               <a:spcAft>
                 <a:spcPts val="1000"/>
               </a:spcAft>
+              <a:buSzPct val="100000"/>
               <a:buChar char="•"/>
               <a:lnSpc>
                 <a:spcPts val="2200"/>
@@ -4434,10 +4440,12 @@
           </a:bodyPr>
           <a:lstStyle/>
           <a:p>
-            <a:pPr>
+            <a:pPr lvl="0" marL="457200" indent="-228600">
+              <a:buFont typeface="Calibri"/>
               <a:spcAft>
                 <a:spcPts val="1000"/>
               </a:spcAft>
+              <a:buSzPct val="100000"/>
               <a:buChar char="•"/>
               <a:lnSpc>
                 <a:spcPts val="2200"/>
@@ -4454,10 +4462,12 @@
             </a:r>
           </a:p>
           <a:p>
-            <a:pPr>
+            <a:pPr lvl="0" marL="457200" indent="-228600">
+              <a:buFont typeface="Calibri"/>
               <a:spcAft>
                 <a:spcPts val="1000"/>
               </a:spcAft>
+              <a:buSzPct val="100000"/>
               <a:buChar char="•"/>
               <a:lnSpc>
                 <a:spcPts val="2200"/>
@@ -4474,10 +4484,12 @@
             </a:r>
           </a:p>
           <a:p>
-            <a:pPr>
+            <a:pPr lvl="0" marL="457200" indent="-228600">
+              <a:buFont typeface="Calibri"/>
               <a:spcAft>
                 <a:spcPts val="1000"/>
               </a:spcAft>
+              <a:buSzPct val="100000"/>
               <a:buChar char="•"/>
               <a:lnSpc>
                 <a:spcPts val="2200"/>
@@ -4494,10 +4506,12 @@
             </a:r>
           </a:p>
           <a:p>
-            <a:pPr>
+            <a:pPr lvl="0" marL="457200" indent="-228600">
+              <a:buFont typeface="Calibri"/>
               <a:spcAft>
                 <a:spcPts val="1000"/>
               </a:spcAft>
+              <a:buSzPct val="100000"/>
               <a:buChar char="•"/>
               <a:lnSpc>
                 <a:spcPts val="2200"/>
@@ -4514,10 +4528,12 @@
             </a:r>
           </a:p>
           <a:p>
-            <a:pPr>
+            <a:pPr lvl="0" marL="457200" indent="-228600">
+              <a:buFont typeface="Calibri"/>
               <a:spcAft>
                 <a:spcPts val="1000"/>
               </a:spcAft>
+              <a:buSzPct val="100000"/>
               <a:buChar char="•"/>
               <a:lnSpc>
                 <a:spcPts val="2200"/>
@@ -4534,10 +4550,12 @@
             </a:r>
           </a:p>
           <a:p>
-            <a:pPr>
+            <a:pPr lvl="0" marL="457200" indent="-228600">
+              <a:buFont typeface="Calibri"/>
               <a:spcAft>
                 <a:spcPts val="1000"/>
               </a:spcAft>
+              <a:buSzPct val="100000"/>
               <a:buChar char="•"/>
               <a:lnSpc>
                 <a:spcPts val="2200"/>
@@ -4673,10 +4691,12 @@
           </a:bodyPr>
           <a:lstStyle/>
           <a:p>
-            <a:pPr>
+            <a:pPr lvl="0" marL="457200" indent="-228600">
+              <a:buFont typeface="Calibri"/>
               <a:spcAft>
                 <a:spcPts val="1000"/>
               </a:spcAft>
+              <a:buSzPct val="100000"/>
               <a:buChar char="•"/>
               <a:lnSpc>
                 <a:spcPts val="2200"/>
@@ -4693,10 +4713,12 @@
             </a:r>
           </a:p>
           <a:p>
-            <a:pPr>
+            <a:pPr lvl="0" marL="457200" indent="-228600">
+              <a:buFont typeface="Calibri"/>
               <a:spcAft>
                 <a:spcPts val="1000"/>
               </a:spcAft>
+              <a:buSzPct val="100000"/>
               <a:buChar char="•"/>
               <a:lnSpc>
                 <a:spcPts val="2200"/>
@@ -4713,10 +4735,12 @@
             </a:r>
           </a:p>
           <a:p>
-            <a:pPr>
+            <a:pPr lvl="0" marL="457200" indent="-228600">
+              <a:buFont typeface="Calibri"/>
               <a:spcAft>
                 <a:spcPts val="1000"/>
               </a:spcAft>
+              <a:buSzPct val="100000"/>
               <a:buChar char="•"/>
               <a:lnSpc>
                 <a:spcPts val="2200"/>
@@ -4733,10 +4757,12 @@
             </a:r>
           </a:p>
           <a:p>
-            <a:pPr>
+            <a:pPr lvl="0" marL="457200" indent="-228600">
+              <a:buFont typeface="Calibri"/>
               <a:spcAft>
                 <a:spcPts val="1000"/>
               </a:spcAft>
+              <a:buSzPct val="100000"/>
               <a:buChar char="•"/>
               <a:lnSpc>
                 <a:spcPts val="2200"/>
@@ -4872,10 +4898,12 @@
           </a:bodyPr>
           <a:lstStyle/>
           <a:p>
-            <a:pPr>
+            <a:pPr lvl="0" marL="457200" indent="-228600">
+              <a:buFont typeface="Calibri"/>
               <a:spcAft>
                 <a:spcPts val="1000"/>
               </a:spcAft>
+              <a:buSzPct val="100000"/>
               <a:buChar char="•"/>
               <a:lnSpc>
                 <a:spcPts val="2200"/>
@@ -4892,10 +4920,12 @@
             </a:r>
           </a:p>
           <a:p>
-            <a:pPr>
+            <a:pPr lvl="0" marL="457200" indent="-228600">
+              <a:buFont typeface="Calibri"/>
               <a:spcAft>
                 <a:spcPts val="1000"/>
               </a:spcAft>
+              <a:buSzPct val="100000"/>
               <a:buChar char="•"/>
               <a:lnSpc>
                 <a:spcPts val="2200"/>
@@ -4912,10 +4942,12 @@
             </a:r>
           </a:p>
           <a:p>
-            <a:pPr>
+            <a:pPr lvl="0" marL="457200" indent="-228600">
+              <a:buFont typeface="Calibri"/>
               <a:spcAft>
                 <a:spcPts val="1000"/>
               </a:spcAft>
+              <a:buSzPct val="100000"/>
               <a:buChar char="•"/>
               <a:lnSpc>
                 <a:spcPts val="2200"/>
@@ -4932,10 +4964,12 @@
             </a:r>
           </a:p>
           <a:p>
-            <a:pPr>
+            <a:pPr lvl="0" marL="457200" indent="-228600">
+              <a:buFont typeface="Calibri"/>
               <a:spcAft>
                 <a:spcPts val="1000"/>
               </a:spcAft>
+              <a:buSzPct val="100000"/>
               <a:buChar char="•"/>
               <a:lnSpc>
                 <a:spcPts val="2200"/>
@@ -4952,10 +4986,12 @@
             </a:r>
           </a:p>
           <a:p>
-            <a:pPr>
+            <a:pPr lvl="0" marL="457200" indent="-228600">
+              <a:buFont typeface="Calibri"/>
               <a:spcAft>
                 <a:spcPts val="1000"/>
               </a:spcAft>
+              <a:buSzPct val="100000"/>
               <a:buChar char="•"/>
               <a:lnSpc>
                 <a:spcPts val="2200"/>
@@ -5091,10 +5127,12 @@
           </a:bodyPr>
           <a:lstStyle/>
           <a:p>
-            <a:pPr>
+            <a:pPr lvl="0" marL="457200" indent="-228600">
+              <a:buFont typeface="Calibri"/>
               <a:spcAft>
                 <a:spcPts val="1000"/>
               </a:spcAft>
+              <a:buSzPct val="100000"/>
               <a:buChar char="•"/>
               <a:lnSpc>
                 <a:spcPts val="2200"/>
@@ -5111,10 +5149,12 @@
             </a:r>
           </a:p>
           <a:p>
-            <a:pPr>
+            <a:pPr lvl="0" marL="457200" indent="-228600">
+              <a:buFont typeface="Calibri"/>
               <a:spcAft>
                 <a:spcPts val="1000"/>
               </a:spcAft>
+              <a:buSzPct val="100000"/>
               <a:buChar char="•"/>
               <a:lnSpc>
                 <a:spcPts val="2200"/>
@@ -5131,10 +5171,12 @@
             </a:r>
           </a:p>
           <a:p>
-            <a:pPr>
+            <a:pPr lvl="0" marL="457200" indent="-228600">
+              <a:buFont typeface="Calibri"/>
               <a:spcAft>
                 <a:spcPts val="1000"/>
               </a:spcAft>
+              <a:buSzPct val="100000"/>
               <a:buChar char="•"/>
               <a:lnSpc>
                 <a:spcPts val="2200"/>
@@ -5151,10 +5193,12 @@
             </a:r>
           </a:p>
           <a:p>
-            <a:pPr>
+            <a:pPr lvl="0" marL="457200" indent="-228600">
+              <a:buFont typeface="Calibri"/>
               <a:spcAft>
                 <a:spcPts val="1000"/>
               </a:spcAft>
+              <a:buSzPct val="100000"/>
               <a:buChar char="•"/>
               <a:lnSpc>
                 <a:spcPts val="2200"/>
@@ -5171,10 +5215,12 @@
             </a:r>
           </a:p>
           <a:p>
-            <a:pPr>
+            <a:pPr lvl="0" marL="457200" indent="-228600">
+              <a:buFont typeface="Calibri"/>
               <a:spcAft>
                 <a:spcPts val="1000"/>
               </a:spcAft>
+              <a:buSzPct val="100000"/>
               <a:buChar char="•"/>
               <a:lnSpc>
                 <a:spcPts val="2200"/>
@@ -5191,10 +5237,12 @@
             </a:r>
           </a:p>
           <a:p>
-            <a:pPr>
+            <a:pPr lvl="0" marL="457200" indent="-228600">
+              <a:buFont typeface="Calibri"/>
               <a:spcAft>
                 <a:spcPts val="1000"/>
               </a:spcAft>
+              <a:buSzPct val="100000"/>
               <a:buChar char="•"/>
               <a:lnSpc>
                 <a:spcPts val="2200"/>
@@ -5330,10 +5378,12 @@
           </a:bodyPr>
           <a:lstStyle/>
           <a:p>
-            <a:pPr>
+            <a:pPr lvl="0" marL="457200" indent="-228600">
+              <a:buFont typeface="Calibri"/>
               <a:spcAft>
                 <a:spcPts val="1000"/>
               </a:spcAft>
+              <a:buSzPct val="100000"/>
               <a:buChar char="•"/>
               <a:lnSpc>
                 <a:spcPts val="2200"/>
@@ -5350,10 +5400,12 @@
             </a:r>
           </a:p>
           <a:p>
-            <a:pPr>
+            <a:pPr lvl="0" marL="457200" indent="-228600">
+              <a:buFont typeface="Calibri"/>
               <a:spcAft>
                 <a:spcPts val="1000"/>
               </a:spcAft>
+              <a:buSzPct val="100000"/>
               <a:buChar char="•"/>
               <a:lnSpc>
                 <a:spcPts val="2200"/>
@@ -5370,10 +5422,12 @@
             </a:r>
           </a:p>
           <a:p>
-            <a:pPr>
+            <a:pPr lvl="0" marL="457200" indent="-228600">
+              <a:buFont typeface="Calibri"/>
               <a:spcAft>
                 <a:spcPts val="1000"/>
               </a:spcAft>
+              <a:buSzPct val="100000"/>
               <a:buChar char="•"/>
               <a:lnSpc>
                 <a:spcPts val="2200"/>
@@ -5509,10 +5563,12 @@
           </a:bodyPr>
           <a:lstStyle/>
           <a:p>
-            <a:pPr>
+            <a:pPr lvl="0" marL="457200" indent="-228600">
+              <a:buFont typeface="Calibri"/>
               <a:spcAft>
                 <a:spcPts val="1000"/>
               </a:spcAft>
+              <a:buSzPct val="100000"/>
               <a:buChar char="•"/>
               <a:lnSpc>
                 <a:spcPts val="2200"/>
@@ -5529,10 +5585,12 @@
             </a:r>
           </a:p>
           <a:p>
-            <a:pPr>
+            <a:pPr lvl="0" marL="457200" indent="-228600">
+              <a:buFont typeface="Calibri"/>
               <a:spcAft>
                 <a:spcPts val="1000"/>
               </a:spcAft>
+              <a:buSzPct val="100000"/>
               <a:buChar char="•"/>
               <a:lnSpc>
                 <a:spcPts val="2200"/>
@@ -5549,10 +5607,12 @@
             </a:r>
           </a:p>
           <a:p>
-            <a:pPr>
+            <a:pPr lvl="0" marL="457200" indent="-228600">
+              <a:buFont typeface="Calibri"/>
               <a:spcAft>
                 <a:spcPts val="1000"/>
               </a:spcAft>
+              <a:buSzPct val="100000"/>
               <a:buChar char="•"/>
               <a:lnSpc>
                 <a:spcPts val="2200"/>
@@ -5688,10 +5748,12 @@
           </a:bodyPr>
           <a:lstStyle/>
           <a:p>
-            <a:pPr>
+            <a:pPr lvl="0" marL="457200" indent="-228600">
+              <a:buFont typeface="Calibri"/>
               <a:spcAft>
                 <a:spcPts val="1000"/>
               </a:spcAft>
+              <a:buSzPct val="100000"/>
               <a:buChar char="•"/>
               <a:lnSpc>
                 <a:spcPts val="2200"/>
@@ -5708,10 +5770,12 @@
             </a:r>
           </a:p>
           <a:p>
-            <a:pPr>
+            <a:pPr lvl="0" marL="457200" indent="-228600">
+              <a:buFont typeface="Calibri"/>
               <a:spcAft>
                 <a:spcPts val="1000"/>
               </a:spcAft>
+              <a:buSzPct val="100000"/>
               <a:buChar char="•"/>
               <a:lnSpc>
                 <a:spcPts val="2200"/>
